--- a/Лабораторна_1.pptx
+++ b/Лабораторна_1.pptx
@@ -8,7 +8,7 @@
     <p:sldId id="256" r:id="rId2"/>
     <p:sldId id="257" r:id="rId3"/>
     <p:sldId id="258" r:id="rId4"/>
-    <p:sldId id="259" r:id="rId9"/>
+    <p:sldId id="259" r:id="rId5"/>
   </p:sldIdLst>
   <p:sldSz cx="12192000" cy="6858000"/>
   <p:notesSz cx="6858000" cy="9144000"/>
@@ -107,6 +107,11 @@
       </a:defRPr>
     </a:lvl9pPr>
   </p:defaultTextStyle>
+  <p:extLst>
+    <p:ext uri="{EFAFB233-063F-42B5-8137-9DF3F51BA10A}">
+      <p15:sldGuideLst xmlns:p15="http://schemas.microsoft.com/office/powerpoint/2012/main"/>
+    </p:ext>
+  </p:extLst>
 </p:presentation>
 </file>
 
@@ -3710,18 +3715,13 @@
               <a:rPr lang="ru-RU" sz="1400" b="1" dirty="0"/>
               <a:t>:</a:t>
             </a:r>
-            <a:endParaRPr lang="ru-RU" sz="1400" dirty="0"/>
-          </a:p>
-          <a:p>
-            <a:pPr marL="342900" indent="-342900">
-              <a:spcBef>
-                <a:spcPts val="0"/>
-              </a:spcBef>
-              <a:buAutoNum type="arabicPeriod"/>
-            </a:pPr>
+            <a:r>
+              <a:rPr lang="en-US" sz="1400" b="1" dirty="0"/>
+              <a:t> </a:t>
+            </a:r>
             <a:r>
               <a:rPr lang="uk-UA" sz="1400" dirty="0"/>
-              <a:t>Здійснити проведення налаштування робочого середовища для подальшого виконання лабораторних робіт.</a:t>
+              <a:t>здійснити проведення налаштування робочого середовища для подальшого виконання лабораторних робіт.</a:t>
             </a:r>
           </a:p>
           <a:p>
@@ -3989,7 +3989,7 @@
         <p:spPr>
           <a:xfrm>
             <a:off x="1102467" y="309266"/>
-            <a:ext cx="10000000" cy="5000000"/>
+            <a:ext cx="10000000" cy="861774"/>
           </a:xfrm>
           <a:prstGeom prst="rect">
             <a:avLst/>
@@ -4010,86 +4010,297 @@
           <a:p>
             <a:r>
               <a:rPr lang="uk-UA" sz="1200" b="0" dirty="0"/>
-              <a:t>Встановлення та налаштування VS Code</a:t>
-            </a:r>
-          </a:p>
-          <a:p>
-            <a:r>
-              <a:rPr lang="uk-UA" sz="1200" b="0" dirty="0"/>
-              <a:t>[СКРІНШОТ: Вітальне вікно VS Code після встановлення]</a:t>
-            </a:r>
-          </a:p>
-          <a:p>
-            <a:r>
-              <a:rPr lang="uk-UA" sz="1200" b="0" dirty="0"/>
-              <a:t>Встановлення Node.js (LTS версія)</a:t>
-            </a:r>
-          </a:p>
-          <a:p>
-            <a:r>
-              <a:rPr lang="uk-UA" sz="1200" b="0" dirty="0"/>
-              <a:t>[СКРІНШОТ: Результат виконання команд node -v та npm -v у командному рядку]</a:t>
-            </a:r>
-          </a:p>
-          <a:p>
-            <a:r>
-              <a:rPr lang="uk-UA" sz="1200" b="0" dirty="0"/>
-              <a:t>Створення файлу test.js зі скриптом: console.log("Бойко Олексій") та його запуск</a:t>
-            </a:r>
-          </a:p>
-          <a:p>
-            <a:r>
-              <a:rPr lang="uk-UA" sz="1200" b="0" dirty="0"/>
-              <a:t>[СКРІНШОТ: Код першого файлу test.js у VS Code]</a:t>
-            </a:r>
-          </a:p>
-          <a:p>
-            <a:r>
-              <a:rPr lang="uk-UA" sz="1200" b="0" dirty="0"/>
-              <a:t>[СКРІНШОТ: Команда запуску скрипта у консолі: node test.js]</a:t>
-            </a:r>
-          </a:p>
-          <a:p>
-            <a:r>
-              <a:rPr lang="uk-UA" sz="1200" b="0" dirty="0"/>
-              <a:t>[СКРІНШОТ: Результат виконання - виведення прізвища та імені у консолі]</a:t>
-            </a:r>
-          </a:p>
-          <a:p>
-            <a:r>
-              <a:rPr lang="uk-UA" sz="1200" b="0" dirty="0"/>
-              <a:t>Встановлення Git та перевірка: git --version</a:t>
-            </a:r>
-          </a:p>
-          <a:p>
-            <a:r>
-              <a:rPr lang="uk-UA" sz="1200" b="0" dirty="0"/>
-              <a:t>[СКРІНШОТ: Результат виконання команди git --version]</a:t>
-            </a:r>
-          </a:p>
-          <a:p>
-            <a:r>
-              <a:rPr lang="uk-UA" sz="1200" b="0" dirty="0"/>
-              <a:t>Створення облікового запису на GitHub та налаштування SSH-ключа</a:t>
-            </a:r>
-          </a:p>
-          <a:p>
-            <a:r>
-              <a:rPr lang="uk-UA" sz="1200" b="0" dirty="0"/>
-              <a:t>Ініціалізація локального репозиторію та завантаження на GitHub: git add ., git commit, git push</a:t>
-            </a:r>
-          </a:p>
-          <a:p>
-            <a:r>
-              <a:rPr lang="uk-UA" sz="1200" b="0" dirty="0"/>
-              <a:t>[СКРІНШОТ: Репозиторій на GitHub з папкою лабораторної роботи]</a:t>
-            </a:r>
-          </a:p>
-          <a:p>
-            <a:r>
-              <a:rPr lang="uk-UA" sz="1200" b="0" dirty="0"/>
-              <a:t>Посилання на GitHub репозиторій: https://github.com/[ваш_акаунт]/auto-testing-labs</a:t>
-            </a:r>
+              <a:t>Оскільки VS </a:t>
+            </a:r>
+            <a:r>
+              <a:rPr lang="uk-UA" sz="1200" b="0" dirty="0" err="1"/>
+              <a:t>Code</a:t>
+            </a:r>
+            <a:r>
+              <a:rPr lang="uk-UA" sz="1200" dirty="0"/>
+              <a:t> наявний на комп’ютері, </a:t>
+            </a:r>
+            <a:r>
+              <a:rPr lang="en-US" sz="1200" dirty="0"/>
+              <a:t>node.js </a:t>
+            </a:r>
+            <a:r>
+              <a:rPr lang="uk-UA" sz="1200" dirty="0"/>
+              <a:t>та </a:t>
+            </a:r>
+            <a:r>
+              <a:rPr lang="en-US" sz="1200" dirty="0" err="1"/>
+              <a:t>npm</a:t>
+            </a:r>
+            <a:r>
+              <a:rPr lang="en-US" sz="1200" dirty="0"/>
+              <a:t> </a:t>
+            </a:r>
+            <a:r>
+              <a:rPr lang="uk-UA" sz="1200" dirty="0"/>
+              <a:t>встановлені, було лиш оновлено </a:t>
+            </a:r>
+            <a:r>
+              <a:rPr lang="en-US" sz="1200" dirty="0"/>
+              <a:t>node.js </a:t>
+            </a:r>
+            <a:r>
+              <a:rPr lang="uk-UA" sz="1200" dirty="0"/>
+              <a:t>до </a:t>
+            </a:r>
+            <a:r>
+              <a:rPr lang="en-US" sz="1200" dirty="0"/>
+              <a:t>LTS </a:t>
+            </a:r>
+            <a:r>
+              <a:rPr lang="uk-UA" sz="1200" dirty="0"/>
+              <a:t>версії. Далі було створено скрипт з виводом імені в консоль та виконано. Результат показано на наступному рисунку:</a:t>
+            </a:r>
+            <a:br>
+              <a:rPr lang="uk-UA" sz="1200" dirty="0"/>
+            </a:br>
+            <a:endParaRPr lang="uk-UA" sz="1200" dirty="0"/>
+          </a:p>
+        </p:txBody>
+      </p:sp>
+      <p:pic>
+        <p:nvPicPr>
+          <p:cNvPr id="3" name="Picture 2">
+            <a:extLst>
+              <a:ext uri="{FF2B5EF4-FFF2-40B4-BE49-F238E27FC236}">
+                <a16:creationId xmlns:a16="http://schemas.microsoft.com/office/drawing/2014/main" id="{FA421D8F-FFD2-1FB8-2B66-CB927D810BED}"/>
+              </a:ext>
+            </a:extLst>
+          </p:cNvPr>
+          <p:cNvPicPr>
+            <a:picLocks noChangeAspect="1"/>
+          </p:cNvPicPr>
+          <p:nvPr/>
+        </p:nvPicPr>
+        <p:blipFill>
+          <a:blip r:embed="rId2"/>
+          <a:stretch>
+            <a:fillRect/>
+          </a:stretch>
+        </p:blipFill>
+        <p:spPr>
+          <a:xfrm>
+            <a:off x="1102467" y="1002637"/>
+            <a:ext cx="5953329" cy="2654963"/>
+          </a:xfrm>
+          <a:prstGeom prst="rect">
+            <a:avLst/>
+          </a:prstGeom>
+        </p:spPr>
+      </p:pic>
+      <p:sp>
+        <p:nvSpPr>
+          <p:cNvPr id="6" name="TextBox 5">
+            <a:extLst>
+              <a:ext uri="{FF2B5EF4-FFF2-40B4-BE49-F238E27FC236}">
+                <a16:creationId xmlns:a16="http://schemas.microsoft.com/office/drawing/2014/main" id="{8A279F57-0D51-B2F4-A0DD-EA4EE76AAC0C}"/>
+              </a:ext>
+            </a:extLst>
+          </p:cNvPr>
+          <p:cNvSpPr txBox="1"/>
+          <p:nvPr/>
+        </p:nvSpPr>
+        <p:spPr>
+          <a:xfrm>
+            <a:off x="1096000" y="3827751"/>
+            <a:ext cx="10000000" cy="523220"/>
+          </a:xfrm>
+          <a:prstGeom prst="rect">
+            <a:avLst/>
+          </a:prstGeom>
+          <a:noFill/>
+        </p:spPr>
+        <p:txBody>
+          <a:bodyPr wrap="square">
+            <a:spAutoFit/>
+          </a:bodyPr>
+          <a:lstStyle/>
+          <a:p>
+            <a:r>
+              <a:rPr lang="en-US" sz="1400" b="0" dirty="0"/>
+              <a:t>Git </a:t>
+            </a:r>
+            <a:r>
+              <a:rPr lang="uk-UA" sz="1400" b="0" dirty="0"/>
+              <a:t>наявний на комп’ютері, </a:t>
+            </a:r>
+            <a:r>
+              <a:rPr lang="uk-UA" sz="1400" dirty="0"/>
+              <a:t>як і </a:t>
+            </a:r>
+            <a:r>
+              <a:rPr lang="uk-UA" sz="1400" b="0" dirty="0"/>
+              <a:t>обліковий</a:t>
+            </a:r>
+            <a:r>
+              <a:rPr lang="en-US" sz="1400" b="0" dirty="0"/>
+              <a:t> </a:t>
+            </a:r>
+            <a:r>
+              <a:rPr lang="uk-UA" sz="1400" b="0" dirty="0"/>
+              <a:t>запис в </a:t>
+            </a:r>
+            <a:r>
+              <a:rPr lang="en-US" sz="1400" b="0" dirty="0"/>
+              <a:t>GitHub</a:t>
+            </a:r>
+            <a:r>
+              <a:rPr lang="uk-UA" sz="1400" dirty="0"/>
+              <a:t>. Тому наступним було створення репозиторію та публікація на обліковий</a:t>
+            </a:r>
+            <a:r>
+              <a:rPr lang="en-US" sz="1400" dirty="0"/>
+              <a:t> </a:t>
+            </a:r>
+            <a:r>
+              <a:rPr lang="uk-UA" sz="1400" dirty="0"/>
+              <a:t>запис. Результати показані на наступному рисунку:</a:t>
+            </a:r>
+            <a:endParaRPr lang="uk-UA" sz="1400" b="0" dirty="0"/>
+          </a:p>
+        </p:txBody>
+      </p:sp>
+      <p:pic>
+        <p:nvPicPr>
+          <p:cNvPr id="8" name="Picture 7">
+            <a:extLst>
+              <a:ext uri="{FF2B5EF4-FFF2-40B4-BE49-F238E27FC236}">
+                <a16:creationId xmlns:a16="http://schemas.microsoft.com/office/drawing/2014/main" id="{4D39A8B3-1993-779B-B1BC-8815772480A0}"/>
+              </a:ext>
+            </a:extLst>
+          </p:cNvPr>
+          <p:cNvPicPr>
+            <a:picLocks noChangeAspect="1"/>
+          </p:cNvPicPr>
+          <p:nvPr/>
+        </p:nvPicPr>
+        <p:blipFill>
+          <a:blip r:embed="rId3"/>
+          <a:stretch>
+            <a:fillRect/>
+          </a:stretch>
+        </p:blipFill>
+        <p:spPr>
+          <a:xfrm>
+            <a:off x="1102467" y="4350971"/>
+            <a:ext cx="4434279" cy="1515142"/>
+          </a:xfrm>
+          <a:prstGeom prst="rect">
+            <a:avLst/>
+          </a:prstGeom>
+        </p:spPr>
+      </p:pic>
+      <p:pic>
+        <p:nvPicPr>
+          <p:cNvPr id="10" name="Picture 9">
+            <a:extLst>
+              <a:ext uri="{FF2B5EF4-FFF2-40B4-BE49-F238E27FC236}">
+                <a16:creationId xmlns:a16="http://schemas.microsoft.com/office/drawing/2014/main" id="{4E4F6614-73C5-2E75-6532-7EF0B8D1D4CF}"/>
+              </a:ext>
+            </a:extLst>
+          </p:cNvPr>
+          <p:cNvPicPr>
+            <a:picLocks noChangeAspect="1"/>
+          </p:cNvPicPr>
+          <p:nvPr/>
+        </p:nvPicPr>
+        <p:blipFill>
+          <a:blip r:embed="rId4"/>
+          <a:stretch>
+            <a:fillRect/>
+          </a:stretch>
+        </p:blipFill>
+        <p:spPr>
+          <a:xfrm>
+            <a:off x="5714716" y="4350971"/>
+            <a:ext cx="3474679" cy="1516787"/>
+          </a:xfrm>
+          <a:prstGeom prst="rect">
+            <a:avLst/>
+          </a:prstGeom>
+        </p:spPr>
+      </p:pic>
+      <p:sp>
+        <p:nvSpPr>
+          <p:cNvPr id="12" name="TextBox 11">
+            <a:extLst>
+              <a:ext uri="{FF2B5EF4-FFF2-40B4-BE49-F238E27FC236}">
+                <a16:creationId xmlns:a16="http://schemas.microsoft.com/office/drawing/2014/main" id="{C5D28970-8DB2-552E-8E01-A22E807CACAF}"/>
+              </a:ext>
+            </a:extLst>
+          </p:cNvPr>
+          <p:cNvSpPr txBox="1"/>
+          <p:nvPr/>
+        </p:nvSpPr>
+        <p:spPr>
+          <a:xfrm>
+            <a:off x="1096000" y="6272132"/>
+            <a:ext cx="6093994" cy="307777"/>
+          </a:xfrm>
+          <a:prstGeom prst="rect">
+            <a:avLst/>
+          </a:prstGeom>
+          <a:noFill/>
+        </p:spPr>
+        <p:txBody>
+          <a:bodyPr wrap="square">
+            <a:spAutoFit/>
+          </a:bodyPr>
+          <a:lstStyle/>
+          <a:p>
+            <a:r>
+              <a:rPr lang="uk-UA" sz="1400" dirty="0"/>
+              <a:t>https://github.com/AlexBoiko412/auto-testing-lab1</a:t>
+            </a:r>
+          </a:p>
+        </p:txBody>
+      </p:sp>
+      <p:sp>
+        <p:nvSpPr>
+          <p:cNvPr id="13" name="TextBox 12">
+            <a:extLst>
+              <a:ext uri="{FF2B5EF4-FFF2-40B4-BE49-F238E27FC236}">
+                <a16:creationId xmlns:a16="http://schemas.microsoft.com/office/drawing/2014/main" id="{1B55F837-0B21-EEB0-365D-11C84A4FEDB7}"/>
+              </a:ext>
+            </a:extLst>
+          </p:cNvPr>
+          <p:cNvSpPr txBox="1"/>
+          <p:nvPr/>
+        </p:nvSpPr>
+        <p:spPr>
+          <a:xfrm>
+            <a:off x="1096000" y="5964355"/>
+            <a:ext cx="10000000" cy="307777"/>
+          </a:xfrm>
+          <a:prstGeom prst="rect">
+            <a:avLst/>
+          </a:prstGeom>
+          <a:noFill/>
+        </p:spPr>
+        <p:txBody>
+          <a:bodyPr wrap="square">
+            <a:spAutoFit/>
+          </a:bodyPr>
+          <a:lstStyle/>
+          <a:p>
+            <a:r>
+              <a:rPr lang="uk-UA" sz="1400" dirty="0"/>
+              <a:t>Посилання на </a:t>
+            </a:r>
+            <a:r>
+              <a:rPr lang="uk-UA" sz="1400" dirty="0" err="1"/>
+              <a:t>репозиорій</a:t>
+            </a:r>
+            <a:r>
+              <a:rPr lang="uk-UA" sz="1400" dirty="0"/>
+              <a:t>:</a:t>
+            </a:r>
+            <a:endParaRPr lang="uk-UA" sz="1400" b="0" dirty="0"/>
           </a:p>
         </p:txBody>
       </p:sp>
@@ -4107,7 +4318,7 @@
 </file>
 
 <file path=ppt/slides/slide4.xml><?xml version="1.0" encoding="utf-8"?>
-<p:sld xmlns:a="http://schemas.openxmlformats.org/drawingml/2006/main" xmlns:p="http://schemas.openxmlformats.org/presentationml/2006/main" xmlns:r="http://schemas.openxmlformats.org/officeDocument/2006/relationships">
+<p:sld xmlns:a="http://schemas.openxmlformats.org/drawingml/2006/main" xmlns:r="http://schemas.openxmlformats.org/officeDocument/2006/relationships" xmlns:p="http://schemas.openxmlformats.org/presentationml/2006/main">
   <p:cSld>
     <p:spTree>
       <p:nvGrpSpPr>
@@ -4115,7 +4326,14 @@
         <p:cNvGrpSpPr/>
         <p:nvPr/>
       </p:nvGrpSpPr>
-      <p:grpSpPr/>
+      <p:grpSpPr>
+        <a:xfrm>
+          <a:off x="0" y="0"/>
+          <a:ext cx="0" cy="0"/>
+          <a:chOff x="0" y="0"/>
+          <a:chExt cx="0" cy="0"/>
+        </a:xfrm>
+      </p:grpSpPr>
       <p:sp>
         <p:nvSpPr>
           <p:cNvPr id="2" name="Title 1"/>
@@ -4128,12 +4346,24 @@
         </p:nvSpPr>
         <p:spPr/>
         <p:txBody>
-          <a:bodyPr/>
-          <a:lstStyle/>
-          <a:p>
-            <a:r>
-              <a:t>5. Висновки</a:t>
-            </a:r>
+          <a:bodyPr>
+            <a:normAutofit/>
+          </a:bodyPr>
+          <a:lstStyle/>
+          <a:p>
+            <a:r>
+              <a:rPr lang="en-US" sz="1400" b="1" dirty="0"/>
+              <a:t>4</a:t>
+            </a:r>
+            <a:r>
+              <a:rPr sz="1400" b="1" dirty="0"/>
+              <a:t>. </a:t>
+            </a:r>
+            <a:r>
+              <a:rPr sz="1400" b="1" dirty="0" err="1"/>
+              <a:t>Висновки</a:t>
+            </a:r>
+            <a:endParaRPr sz="1400" b="1" dirty="0"/>
           </a:p>
         </p:txBody>
       </p:sp>
@@ -4147,14 +4377,206 @@
             <p:ph idx="1"/>
           </p:nvPr>
         </p:nvSpPr>
-        <p:spPr/>
-        <p:txBody>
-          <a:bodyPr/>
-          <a:lstStyle/>
-          <a:p>
-            <a:r>
-              <a:rPr sz="1400"/>
-              <a:t>В ході виконання лабораторної роботи №1 було налаштоване робоче середовище: встановлено VS Code, Node.js, Git та створено обліковий запис на GitHub. Перевірено роботу Node.js шляхом створення та виконання простого JS-скрипту. Налаштовано синхронізацію локального git-репозиторію з GitHub.</a:t>
+        <p:spPr>
+          <a:xfrm>
+            <a:off x="838200" y="1380457"/>
+            <a:ext cx="10515600" cy="1158206"/>
+          </a:xfrm>
+        </p:spPr>
+        <p:txBody>
+          <a:bodyPr/>
+          <a:lstStyle/>
+          <a:p>
+            <a:pPr marL="0" indent="0">
+              <a:buNone/>
+            </a:pPr>
+            <a:r>
+              <a:rPr lang="en-US" sz="1400" dirty="0"/>
+              <a:t>          </a:t>
+            </a:r>
+            <a:r>
+              <a:rPr sz="1400" dirty="0"/>
+              <a:t>В </a:t>
+            </a:r>
+            <a:r>
+              <a:rPr sz="1400" dirty="0" err="1"/>
+              <a:t>ході</a:t>
+            </a:r>
+            <a:r>
+              <a:rPr sz="1400" dirty="0"/>
+              <a:t> </a:t>
+            </a:r>
+            <a:r>
+              <a:rPr sz="1400" dirty="0" err="1"/>
+              <a:t>виконання</a:t>
+            </a:r>
+            <a:r>
+              <a:rPr sz="1400" dirty="0"/>
+              <a:t> </a:t>
+            </a:r>
+            <a:r>
+              <a:rPr sz="1400" dirty="0" err="1"/>
+              <a:t>лабораторної</a:t>
+            </a:r>
+            <a:r>
+              <a:rPr sz="1400" dirty="0"/>
+              <a:t> </a:t>
+            </a:r>
+            <a:r>
+              <a:rPr sz="1400" dirty="0" err="1"/>
+              <a:t>роботи</a:t>
+            </a:r>
+            <a:r>
+              <a:rPr sz="1400" dirty="0"/>
+              <a:t> №1 </a:t>
+            </a:r>
+            <a:r>
+              <a:rPr sz="1400" dirty="0" err="1"/>
+              <a:t>було</a:t>
+            </a:r>
+            <a:r>
+              <a:rPr sz="1400" dirty="0"/>
+              <a:t> </a:t>
+            </a:r>
+            <a:r>
+              <a:rPr sz="1400" dirty="0" err="1"/>
+              <a:t>налаштоване</a:t>
+            </a:r>
+            <a:r>
+              <a:rPr sz="1400" dirty="0"/>
+              <a:t> </a:t>
+            </a:r>
+            <a:r>
+              <a:rPr sz="1400" dirty="0" err="1"/>
+              <a:t>робоче</a:t>
+            </a:r>
+            <a:r>
+              <a:rPr sz="1400" dirty="0"/>
+              <a:t> </a:t>
+            </a:r>
+            <a:r>
+              <a:rPr sz="1400" dirty="0" err="1"/>
+              <a:t>середовище</a:t>
+            </a:r>
+            <a:r>
+              <a:rPr sz="1400" dirty="0"/>
+              <a:t>:</a:t>
+            </a:r>
+            <a:r>
+              <a:rPr lang="en-US" sz="1400" dirty="0"/>
+              <a:t> </a:t>
+            </a:r>
+            <a:r>
+              <a:rPr sz="1400" dirty="0"/>
+              <a:t>VS Code, Node.js, Gi</a:t>
+            </a:r>
+            <a:r>
+              <a:rPr lang="en-US" sz="1400" dirty="0"/>
+              <a:t>t</a:t>
+            </a:r>
+            <a:r>
+              <a:rPr sz="1400" dirty="0"/>
+              <a:t>. </a:t>
+            </a:r>
+            <a:r>
+              <a:rPr sz="1400" dirty="0" err="1"/>
+              <a:t>Перевірено</a:t>
+            </a:r>
+            <a:r>
+              <a:rPr sz="1400" dirty="0"/>
+              <a:t> </a:t>
+            </a:r>
+            <a:r>
+              <a:rPr sz="1400" dirty="0" err="1"/>
+              <a:t>роботу</a:t>
+            </a:r>
+            <a:r>
+              <a:rPr sz="1400" dirty="0"/>
+              <a:t> Node.js </a:t>
+            </a:r>
+            <a:r>
+              <a:rPr sz="1400" dirty="0" err="1"/>
+              <a:t>шляхом</a:t>
+            </a:r>
+            <a:r>
+              <a:rPr sz="1400" dirty="0"/>
+              <a:t> </a:t>
+            </a:r>
+            <a:r>
+              <a:rPr sz="1400" dirty="0" err="1"/>
+              <a:t>створення</a:t>
+            </a:r>
+            <a:r>
+              <a:rPr sz="1400" dirty="0"/>
+              <a:t> </a:t>
+            </a:r>
+            <a:r>
+              <a:rPr sz="1400" dirty="0" err="1"/>
+              <a:t>та</a:t>
+            </a:r>
+            <a:r>
+              <a:rPr sz="1400" dirty="0"/>
+              <a:t> </a:t>
+            </a:r>
+            <a:r>
+              <a:rPr sz="1400" dirty="0" err="1"/>
+              <a:t>виконання</a:t>
+            </a:r>
+            <a:r>
+              <a:rPr sz="1400" dirty="0"/>
+              <a:t> </a:t>
+            </a:r>
+            <a:r>
+              <a:rPr sz="1400" dirty="0" err="1"/>
+              <a:t>простого</a:t>
+            </a:r>
+            <a:r>
+              <a:rPr sz="1400" dirty="0"/>
+              <a:t> JS</a:t>
+            </a:r>
+            <a:r>
+              <a:rPr lang="uk-UA" sz="1400" dirty="0"/>
+              <a:t> </a:t>
+            </a:r>
+            <a:r>
+              <a:rPr sz="1400" dirty="0" err="1"/>
+              <a:t>скрипту</a:t>
+            </a:r>
+            <a:r>
+              <a:rPr sz="1400" dirty="0"/>
+              <a:t>. </a:t>
+            </a:r>
+            <a:r>
+              <a:rPr sz="1400" dirty="0" err="1"/>
+              <a:t>Налаштовано</a:t>
+            </a:r>
+            <a:r>
+              <a:rPr sz="1400" dirty="0"/>
+              <a:t> </a:t>
+            </a:r>
+            <a:r>
+              <a:rPr sz="1400" dirty="0" err="1"/>
+              <a:t>синхронізацію</a:t>
+            </a:r>
+            <a:r>
+              <a:rPr sz="1400" dirty="0"/>
+              <a:t> </a:t>
+            </a:r>
+            <a:r>
+              <a:rPr sz="1400" dirty="0" err="1"/>
+              <a:t>локального</a:t>
+            </a:r>
+            <a:r>
+              <a:rPr sz="1400" dirty="0"/>
+              <a:t> git-</a:t>
+            </a:r>
+            <a:r>
+              <a:rPr sz="1400" dirty="0" err="1"/>
+              <a:t>репозиторію</a:t>
+            </a:r>
+            <a:r>
+              <a:rPr sz="1400" dirty="0"/>
+              <a:t> з GitHub.</a:t>
             </a:r>
           </a:p>
         </p:txBody>

--- a/Лабораторна_1.pptx
+++ b/Лабораторна_1.pptx
@@ -4151,15 +4151,7 @@
             </a:r>
             <a:r>
               <a:rPr lang="uk-UA" sz="1400" dirty="0"/>
-              <a:t>. Тому наступним було створення репозиторію та публікація на обліковий</a:t>
-            </a:r>
-            <a:r>
-              <a:rPr lang="en-US" sz="1400" dirty="0"/>
-              <a:t> </a:t>
-            </a:r>
-            <a:r>
-              <a:rPr lang="uk-UA" sz="1400" dirty="0"/>
-              <a:t>запис. Результати показані на наступному рисунку:</a:t>
+              <a:t>. Тому наступним було створення репозиторію та публікація на віддалений репозиторій. Результати показані на наступному рисунку:</a:t>
             </a:r>
             <a:endParaRPr lang="uk-UA" sz="1400" b="0" dirty="0"/>
           </a:p>
@@ -4290,15 +4282,7 @@
           <a:p>
             <a:r>
               <a:rPr lang="uk-UA" sz="1400" dirty="0"/>
-              <a:t>Посилання на </a:t>
-            </a:r>
-            <a:r>
-              <a:rPr lang="uk-UA" sz="1400" dirty="0" err="1"/>
-              <a:t>репозиорій</a:t>
-            </a:r>
-            <a:r>
-              <a:rPr lang="uk-UA" sz="1400" dirty="0"/>
-              <a:t>:</a:t>
+              <a:t>Посилання на репозиторій:</a:t>
             </a:r>
             <a:endParaRPr lang="uk-UA" sz="1400" b="0" dirty="0"/>
           </a:p>
@@ -4344,7 +4328,12 @@
             <p:ph type="title"/>
           </p:nvPr>
         </p:nvSpPr>
-        <p:spPr/>
+        <p:spPr>
+          <a:xfrm>
+            <a:off x="838200" y="-153683"/>
+            <a:ext cx="10515600" cy="1325563"/>
+          </a:xfrm>
+        </p:spPr>
         <p:txBody>
           <a:bodyPr>
             <a:normAutofit/>
@@ -4360,7 +4349,7 @@
               <a:t>. </a:t>
             </a:r>
             <a:r>
-              <a:rPr sz="1400" b="1" dirty="0" err="1"/>
+              <a:rPr lang="uk-UA" sz="1400" b="1" dirty="0"/>
               <a:t>Висновки</a:t>
             </a:r>
             <a:endParaRPr sz="1400" b="1" dirty="0"/>
@@ -4379,7 +4368,7 @@
         </p:nvSpPr>
         <p:spPr>
           <a:xfrm>
-            <a:off x="838200" y="1380457"/>
+            <a:off x="838200" y="764372"/>
             <a:ext cx="10515600" cy="1158206"/>
           </a:xfrm>
         </p:spPr>
@@ -4391,193 +4380,54 @@
               <a:buNone/>
             </a:pPr>
             <a:r>
-              <a:rPr lang="en-US" sz="1400" dirty="0"/>
-              <a:t>          </a:t>
-            </a:r>
-            <a:r>
-              <a:rPr sz="1400" dirty="0"/>
-              <a:t>В </a:t>
-            </a:r>
-            <a:r>
-              <a:rPr sz="1400" dirty="0" err="1"/>
-              <a:t>ході</a:t>
-            </a:r>
-            <a:r>
-              <a:rPr sz="1400" dirty="0"/>
-              <a:t> </a:t>
-            </a:r>
-            <a:r>
-              <a:rPr sz="1400" dirty="0" err="1"/>
-              <a:t>виконання</a:t>
-            </a:r>
-            <a:r>
-              <a:rPr sz="1400" dirty="0"/>
-              <a:t> </a:t>
-            </a:r>
-            <a:r>
-              <a:rPr sz="1400" dirty="0" err="1"/>
-              <a:t>лабораторної</a:t>
-            </a:r>
-            <a:r>
-              <a:rPr sz="1400" dirty="0"/>
-              <a:t> </a:t>
-            </a:r>
-            <a:r>
-              <a:rPr sz="1400" dirty="0" err="1"/>
-              <a:t>роботи</a:t>
-            </a:r>
-            <a:r>
-              <a:rPr sz="1400" dirty="0"/>
-              <a:t> №1 </a:t>
-            </a:r>
-            <a:r>
-              <a:rPr sz="1400" dirty="0" err="1"/>
-              <a:t>було</a:t>
-            </a:r>
-            <a:r>
-              <a:rPr sz="1400" dirty="0"/>
-              <a:t> </a:t>
-            </a:r>
-            <a:r>
-              <a:rPr sz="1400" dirty="0" err="1"/>
-              <a:t>налаштоване</a:t>
-            </a:r>
-            <a:r>
-              <a:rPr sz="1400" dirty="0"/>
-              <a:t> </a:t>
-            </a:r>
-            <a:r>
-              <a:rPr sz="1400" dirty="0" err="1"/>
-              <a:t>робоче</a:t>
-            </a:r>
-            <a:r>
-              <a:rPr sz="1400" dirty="0"/>
-              <a:t> </a:t>
-            </a:r>
-            <a:r>
-              <a:rPr sz="1400" dirty="0" err="1"/>
-              <a:t>середовище</a:t>
-            </a:r>
-            <a:r>
-              <a:rPr sz="1400" dirty="0"/>
-              <a:t>:</a:t>
-            </a:r>
-            <a:r>
-              <a:rPr lang="en-US" sz="1400" dirty="0"/>
-              <a:t> </a:t>
-            </a:r>
-            <a:r>
-              <a:rPr sz="1400" dirty="0"/>
-              <a:t>VS Code, Node.js, Gi</a:t>
-            </a:r>
-            <a:r>
-              <a:rPr lang="en-US" sz="1400" dirty="0"/>
-              <a:t>t</a:t>
-            </a:r>
-            <a:r>
-              <a:rPr sz="1400" dirty="0"/>
-              <a:t>. </a:t>
-            </a:r>
-            <a:r>
-              <a:rPr sz="1400" dirty="0" err="1"/>
-              <a:t>Перевірено</a:t>
-            </a:r>
-            <a:r>
-              <a:rPr sz="1400" dirty="0"/>
-              <a:t> </a:t>
-            </a:r>
-            <a:r>
-              <a:rPr sz="1400" dirty="0" err="1"/>
-              <a:t>роботу</a:t>
-            </a:r>
-            <a:r>
-              <a:rPr sz="1400" dirty="0"/>
-              <a:t> Node.js </a:t>
-            </a:r>
-            <a:r>
-              <a:rPr sz="1400" dirty="0" err="1"/>
-              <a:t>шляхом</a:t>
-            </a:r>
-            <a:r>
-              <a:rPr sz="1400" dirty="0"/>
-              <a:t> </a:t>
-            </a:r>
-            <a:r>
-              <a:rPr sz="1400" dirty="0" err="1"/>
-              <a:t>створення</a:t>
-            </a:r>
-            <a:r>
-              <a:rPr sz="1400" dirty="0"/>
-              <a:t> </a:t>
-            </a:r>
-            <a:r>
-              <a:rPr sz="1400" dirty="0" err="1"/>
-              <a:t>та</a:t>
-            </a:r>
-            <a:r>
-              <a:rPr sz="1400" dirty="0"/>
-              <a:t> </a:t>
-            </a:r>
-            <a:r>
-              <a:rPr sz="1400" dirty="0" err="1"/>
-              <a:t>виконання</a:t>
-            </a:r>
-            <a:r>
-              <a:rPr sz="1400" dirty="0"/>
-              <a:t> </a:t>
-            </a:r>
-            <a:r>
-              <a:rPr sz="1400" dirty="0" err="1"/>
-              <a:t>простого</a:t>
-            </a:r>
-            <a:r>
-              <a:rPr sz="1400" dirty="0"/>
-              <a:t> JS</a:t>
-            </a:r>
-            <a:r>
               <a:rPr lang="uk-UA" sz="1400" dirty="0"/>
               <a:t> </a:t>
             </a:r>
             <a:r>
-              <a:rPr sz="1400" dirty="0" err="1"/>
-              <a:t>скрипту</a:t>
-            </a:r>
-            <a:r>
-              <a:rPr sz="1400" dirty="0"/>
-              <a:t>. </a:t>
-            </a:r>
-            <a:r>
-              <a:rPr sz="1400" dirty="0" err="1"/>
-              <a:t>Налаштовано</a:t>
-            </a:r>
-            <a:r>
-              <a:rPr sz="1400" dirty="0"/>
-              <a:t> </a:t>
-            </a:r>
-            <a:r>
-              <a:rPr sz="1400" dirty="0" err="1"/>
-              <a:t>синхронізацію</a:t>
-            </a:r>
-            <a:r>
-              <a:rPr sz="1400" dirty="0"/>
-              <a:t> </a:t>
-            </a:r>
-            <a:r>
-              <a:rPr sz="1400" dirty="0" err="1"/>
-              <a:t>локального</a:t>
-            </a:r>
-            <a:r>
-              <a:rPr sz="1400" dirty="0"/>
-              <a:t> git-</a:t>
-            </a:r>
-            <a:r>
-              <a:rPr sz="1400" dirty="0" err="1"/>
-              <a:t>репозиторію</a:t>
-            </a:r>
-            <a:r>
-              <a:rPr sz="1400" dirty="0"/>
-              <a:t> з GitHub.</a:t>
-            </a:r>
+              <a:rPr lang="en-US" sz="1400" dirty="0"/>
+              <a:t>            </a:t>
+            </a:r>
+            <a:r>
+              <a:rPr lang="uk-UA" sz="1400" dirty="0"/>
+              <a:t>В ході виконання лабораторної роботи №1 було налаштоване робоче середовище: </a:t>
+            </a:r>
+            <a:r>
+              <a:rPr lang="en-US" sz="1400" dirty="0"/>
+              <a:t>VS Code, Node.js, Git. </a:t>
+            </a:r>
+            <a:r>
+              <a:rPr lang="uk-UA" sz="1400" dirty="0"/>
+              <a:t>Перевірено роботу </a:t>
+            </a:r>
+            <a:r>
+              <a:rPr lang="en-US" sz="1400" dirty="0"/>
+              <a:t>Node.js </a:t>
+            </a:r>
+            <a:r>
+              <a:rPr lang="uk-UA" sz="1400" dirty="0"/>
+              <a:t>шляхом створення та виконання простого </a:t>
+            </a:r>
+            <a:r>
+              <a:rPr lang="en-US" sz="1400" dirty="0"/>
+              <a:t>JS </a:t>
+            </a:r>
+            <a:r>
+              <a:rPr lang="uk-UA" sz="1400" dirty="0"/>
+              <a:t>скрипту. Налаштовано синхронізацію локального </a:t>
+            </a:r>
+            <a:r>
+              <a:rPr lang="en-US" sz="1400" dirty="0"/>
+              <a:t>git-</a:t>
+            </a:r>
+            <a:r>
+              <a:rPr lang="uk-UA" sz="1400" dirty="0"/>
+              <a:t>репозиторію з </a:t>
+            </a:r>
+            <a:r>
+              <a:rPr lang="en-US" sz="1400" dirty="0"/>
+              <a:t>GitHub.</a:t>
+            </a:r>
+            <a:endParaRPr sz="1400" dirty="0"/>
           </a:p>
         </p:txBody>
       </p:sp>
